--- a/판서.pptx
+++ b/판서.pptx
@@ -6,6 +6,13 @@
   </p:sldMasterIdLst>
   <p:sldIdLst>
     <p:sldId id="256" r:id="rId2"/>
+    <p:sldId id="257" r:id="rId3"/>
+    <p:sldId id="258" r:id="rId4"/>
+    <p:sldId id="259" r:id="rId5"/>
+    <p:sldId id="260" r:id="rId6"/>
+    <p:sldId id="261" r:id="rId7"/>
+    <p:sldId id="262" r:id="rId8"/>
+    <p:sldId id="263" r:id="rId9"/>
   </p:sldIdLst>
   <p:sldSz cx="12192000" cy="6858000"/>
   <p:notesSz cx="6858000" cy="9144000"/>
@@ -104,6 +111,11 @@
       </a:defRPr>
     </a:lvl9pPr>
   </p:defaultTextStyle>
+  <p:extLst>
+    <p:ext uri="{EFAFB233-063F-42B5-8137-9DF3F51BA10A}">
+      <p15:sldGuideLst xmlns:p15="http://schemas.microsoft.com/office/powerpoint/2012/main"/>
+    </p:ext>
+  </p:extLst>
 </p:presentation>
 </file>
 
@@ -254,7 +266,7 @@
           <a:p>
             <a:fld id="{E540922C-8FE8-4B02-B437-E339CB11B14F}" type="datetimeFigureOut">
               <a:rPr lang="ko-KR" altLang="en-US" smtClean="0"/>
-              <a:t>2026-07-20</a:t>
+              <a:t>2026-07-22</a:t>
             </a:fld>
             <a:endParaRPr lang="ko-KR" altLang="en-US"/>
           </a:p>
@@ -452,7 +464,7 @@
           <a:p>
             <a:fld id="{E540922C-8FE8-4B02-B437-E339CB11B14F}" type="datetimeFigureOut">
               <a:rPr lang="ko-KR" altLang="en-US" smtClean="0"/>
-              <a:t>2026-07-20</a:t>
+              <a:t>2026-07-22</a:t>
             </a:fld>
             <a:endParaRPr lang="ko-KR" altLang="en-US"/>
           </a:p>
@@ -660,7 +672,7 @@
           <a:p>
             <a:fld id="{E540922C-8FE8-4B02-B437-E339CB11B14F}" type="datetimeFigureOut">
               <a:rPr lang="ko-KR" altLang="en-US" smtClean="0"/>
-              <a:t>2026-07-20</a:t>
+              <a:t>2026-07-22</a:t>
             </a:fld>
             <a:endParaRPr lang="ko-KR" altLang="en-US"/>
           </a:p>
@@ -858,7 +870,7 @@
           <a:p>
             <a:fld id="{E540922C-8FE8-4B02-B437-E339CB11B14F}" type="datetimeFigureOut">
               <a:rPr lang="ko-KR" altLang="en-US" smtClean="0"/>
-              <a:t>2026-07-20</a:t>
+              <a:t>2026-07-22</a:t>
             </a:fld>
             <a:endParaRPr lang="ko-KR" altLang="en-US"/>
           </a:p>
@@ -1133,7 +1145,7 @@
           <a:p>
             <a:fld id="{E540922C-8FE8-4B02-B437-E339CB11B14F}" type="datetimeFigureOut">
               <a:rPr lang="ko-KR" altLang="en-US" smtClean="0"/>
-              <a:t>2026-07-20</a:t>
+              <a:t>2026-07-22</a:t>
             </a:fld>
             <a:endParaRPr lang="ko-KR" altLang="en-US"/>
           </a:p>
@@ -1398,7 +1410,7 @@
           <a:p>
             <a:fld id="{E540922C-8FE8-4B02-B437-E339CB11B14F}" type="datetimeFigureOut">
               <a:rPr lang="ko-KR" altLang="en-US" smtClean="0"/>
-              <a:t>2026-07-20</a:t>
+              <a:t>2026-07-22</a:t>
             </a:fld>
             <a:endParaRPr lang="ko-KR" altLang="en-US"/>
           </a:p>
@@ -1810,7 +1822,7 @@
           <a:p>
             <a:fld id="{E540922C-8FE8-4B02-B437-E339CB11B14F}" type="datetimeFigureOut">
               <a:rPr lang="ko-KR" altLang="en-US" smtClean="0"/>
-              <a:t>2026-07-20</a:t>
+              <a:t>2026-07-22</a:t>
             </a:fld>
             <a:endParaRPr lang="ko-KR" altLang="en-US"/>
           </a:p>
@@ -1951,7 +1963,7 @@
           <a:p>
             <a:fld id="{E540922C-8FE8-4B02-B437-E339CB11B14F}" type="datetimeFigureOut">
               <a:rPr lang="ko-KR" altLang="en-US" smtClean="0"/>
-              <a:t>2026-07-20</a:t>
+              <a:t>2026-07-22</a:t>
             </a:fld>
             <a:endParaRPr lang="ko-KR" altLang="en-US"/>
           </a:p>
@@ -2064,7 +2076,7 @@
           <a:p>
             <a:fld id="{E540922C-8FE8-4B02-B437-E339CB11B14F}" type="datetimeFigureOut">
               <a:rPr lang="ko-KR" altLang="en-US" smtClean="0"/>
-              <a:t>2026-07-20</a:t>
+              <a:t>2026-07-22</a:t>
             </a:fld>
             <a:endParaRPr lang="ko-KR" altLang="en-US"/>
           </a:p>
@@ -2375,7 +2387,7 @@
           <a:p>
             <a:fld id="{E540922C-8FE8-4B02-B437-E339CB11B14F}" type="datetimeFigureOut">
               <a:rPr lang="ko-KR" altLang="en-US" smtClean="0"/>
-              <a:t>2026-07-20</a:t>
+              <a:t>2026-07-22</a:t>
             </a:fld>
             <a:endParaRPr lang="ko-KR" altLang="en-US"/>
           </a:p>
@@ -2663,7 +2675,7 @@
           <a:p>
             <a:fld id="{E540922C-8FE8-4B02-B437-E339CB11B14F}" type="datetimeFigureOut">
               <a:rPr lang="ko-KR" altLang="en-US" smtClean="0"/>
-              <a:t>2026-07-20</a:t>
+              <a:t>2026-07-22</a:t>
             </a:fld>
             <a:endParaRPr lang="ko-KR" altLang="en-US"/>
           </a:p>
@@ -2904,7 +2916,7 @@
           <a:p>
             <a:fld id="{E540922C-8FE8-4B02-B437-E339CB11B14F}" type="datetimeFigureOut">
               <a:rPr lang="ko-KR" altLang="en-US" smtClean="0"/>
-              <a:t>2026-07-20</a:t>
+              <a:t>2026-07-22</a:t>
             </a:fld>
             <a:endParaRPr lang="ko-KR" altLang="en-US"/>
           </a:p>
@@ -3378,6 +3390,22 @@
               </a:rPr>
               <a:t>jikim@imguru.co.kr</a:t>
             </a:r>
+            <a:r>
+              <a:rPr lang="en-US" altLang="ko-KR" sz="3200"/>
+              <a:t>   </a:t>
+            </a:r>
+            <a:r>
+              <a:rPr lang="ko-KR" altLang="en-US" sz="3200"/>
+              <a:t>이름</a:t>
+            </a:r>
+            <a:r>
+              <a:rPr lang="en-US" altLang="ko-KR" sz="3200"/>
+              <a:t>.zip </a:t>
+            </a:r>
+            <a:r>
+              <a:rPr lang="ko-KR" altLang="en-US" sz="3200"/>
+              <a:t>으로 제출</a:t>
+            </a:r>
             <a:endParaRPr lang="en-US" altLang="ko-KR" sz="3200"/>
           </a:p>
           <a:p>
@@ -3460,6 +3488,1935 @@
     <p:extLst>
       <p:ext uri="{BB962C8B-B14F-4D97-AF65-F5344CB8AC3E}">
         <p14:creationId xmlns:p14="http://schemas.microsoft.com/office/powerpoint/2010/main" val="3973030174"/>
+      </p:ext>
+    </p:extLst>
+  </p:cSld>
+  <p:clrMapOvr>
+    <a:masterClrMapping/>
+  </p:clrMapOvr>
+</p:sld>
+</file>
+
+<file path=ppt/slides/slide2.xml><?xml version="1.0" encoding="utf-8"?>
+<p:sld xmlns:a="http://schemas.openxmlformats.org/drawingml/2006/main" xmlns:r="http://schemas.openxmlformats.org/officeDocument/2006/relationships" xmlns:p="http://schemas.openxmlformats.org/presentationml/2006/main">
+  <p:cSld>
+    <p:spTree>
+      <p:nvGrpSpPr>
+        <p:cNvPr id="1" name=""/>
+        <p:cNvGrpSpPr/>
+        <p:nvPr/>
+      </p:nvGrpSpPr>
+      <p:grpSpPr>
+        <a:xfrm>
+          <a:off x="0" y="0"/>
+          <a:ext cx="0" cy="0"/>
+          <a:chOff x="0" y="0"/>
+          <a:chExt cx="0" cy="0"/>
+        </a:xfrm>
+      </p:grpSpPr>
+      <p:sp>
+        <p:nvSpPr>
+          <p:cNvPr id="35" name="TextBox 34">
+            <a:extLst>
+              <a:ext uri="{FF2B5EF4-FFF2-40B4-BE49-F238E27FC236}">
+                <a16:creationId xmlns:a16="http://schemas.microsoft.com/office/drawing/2014/main" id="{1D64C228-5407-4231-814D-F89A99794D89}"/>
+              </a:ext>
+            </a:extLst>
+          </p:cNvPr>
+          <p:cNvSpPr txBox="1"/>
+          <p:nvPr/>
+        </p:nvSpPr>
+        <p:spPr>
+          <a:xfrm>
+            <a:off x="245533" y="169334"/>
+            <a:ext cx="9518953" cy="769441"/>
+          </a:xfrm>
+          <a:prstGeom prst="rect">
+            <a:avLst/>
+          </a:prstGeom>
+          <a:noFill/>
+        </p:spPr>
+        <p:txBody>
+          <a:bodyPr wrap="none" rtlCol="0">
+            <a:spAutoFit/>
+          </a:bodyPr>
+          <a:lstStyle/>
+          <a:p>
+            <a:r>
+              <a:rPr lang="en-US" altLang="ko-KR" sz="4400"/>
+              <a:t>https://www.mycompiler.io/ko/new/c</a:t>
+            </a:r>
+            <a:endParaRPr lang="ko-KR" altLang="en-US" sz="4400"/>
+          </a:p>
+        </p:txBody>
+      </p:sp>
+    </p:spTree>
+    <p:extLst>
+      <p:ext uri="{BB962C8B-B14F-4D97-AF65-F5344CB8AC3E}">
+        <p14:creationId xmlns:p14="http://schemas.microsoft.com/office/powerpoint/2010/main" val="2334898696"/>
+      </p:ext>
+    </p:extLst>
+  </p:cSld>
+  <p:clrMapOvr>
+    <a:masterClrMapping/>
+  </p:clrMapOvr>
+</p:sld>
+</file>
+
+<file path=ppt/slides/slide3.xml><?xml version="1.0" encoding="utf-8"?>
+<p:sld xmlns:a="http://schemas.openxmlformats.org/drawingml/2006/main" xmlns:r="http://schemas.openxmlformats.org/officeDocument/2006/relationships" xmlns:p="http://schemas.openxmlformats.org/presentationml/2006/main">
+  <p:cSld>
+    <p:spTree>
+      <p:nvGrpSpPr>
+        <p:cNvPr id="1" name=""/>
+        <p:cNvGrpSpPr/>
+        <p:nvPr/>
+      </p:nvGrpSpPr>
+      <p:grpSpPr>
+        <a:xfrm>
+          <a:off x="0" y="0"/>
+          <a:ext cx="0" cy="0"/>
+          <a:chOff x="0" y="0"/>
+          <a:chExt cx="0" cy="0"/>
+        </a:xfrm>
+      </p:grpSpPr>
+      <p:sp>
+        <p:nvSpPr>
+          <p:cNvPr id="36" name="TextBox 35">
+            <a:extLst>
+              <a:ext uri="{FF2B5EF4-FFF2-40B4-BE49-F238E27FC236}">
+                <a16:creationId xmlns:a16="http://schemas.microsoft.com/office/drawing/2014/main" id="{D80BE439-9FA6-4E32-9B57-7B495FCAEB03}"/>
+              </a:ext>
+            </a:extLst>
+          </p:cNvPr>
+          <p:cNvSpPr txBox="1"/>
+          <p:nvPr/>
+        </p:nvSpPr>
+        <p:spPr>
+          <a:xfrm>
+            <a:off x="0" y="228599"/>
+            <a:ext cx="12573378" cy="769441"/>
+          </a:xfrm>
+          <a:prstGeom prst="rect">
+            <a:avLst/>
+          </a:prstGeom>
+          <a:noFill/>
+        </p:spPr>
+        <p:txBody>
+          <a:bodyPr wrap="none" rtlCol="0">
+            <a:spAutoFit/>
+          </a:bodyPr>
+          <a:lstStyle/>
+          <a:p>
+            <a:r>
+              <a:rPr lang="en-US" altLang="ko-KR" sz="4400"/>
+              <a:t>https://poloclub.github.io/transformer-explainer/</a:t>
+            </a:r>
+            <a:endParaRPr lang="ko-KR" altLang="en-US" sz="4400"/>
+          </a:p>
+        </p:txBody>
+      </p:sp>
+    </p:spTree>
+    <p:extLst>
+      <p:ext uri="{BB962C8B-B14F-4D97-AF65-F5344CB8AC3E}">
+        <p14:creationId xmlns:p14="http://schemas.microsoft.com/office/powerpoint/2010/main" val="932585950"/>
+      </p:ext>
+    </p:extLst>
+  </p:cSld>
+  <p:clrMapOvr>
+    <a:masterClrMapping/>
+  </p:clrMapOvr>
+</p:sld>
+</file>
+
+<file path=ppt/slides/slide4.xml><?xml version="1.0" encoding="utf-8"?>
+<p:sld xmlns:a="http://schemas.openxmlformats.org/drawingml/2006/main" xmlns:r="http://schemas.openxmlformats.org/officeDocument/2006/relationships" xmlns:p="http://schemas.openxmlformats.org/presentationml/2006/main">
+  <p:cSld>
+    <p:spTree>
+      <p:nvGrpSpPr>
+        <p:cNvPr id="1" name=""/>
+        <p:cNvGrpSpPr/>
+        <p:nvPr/>
+      </p:nvGrpSpPr>
+      <p:grpSpPr>
+        <a:xfrm>
+          <a:off x="0" y="0"/>
+          <a:ext cx="0" cy="0"/>
+          <a:chOff x="0" y="0"/>
+          <a:chExt cx="0" cy="0"/>
+        </a:xfrm>
+      </p:grpSpPr>
+      <p:sp>
+        <p:nvSpPr>
+          <p:cNvPr id="36" name="TextBox 35">
+            <a:extLst>
+              <a:ext uri="{FF2B5EF4-FFF2-40B4-BE49-F238E27FC236}">
+                <a16:creationId xmlns:a16="http://schemas.microsoft.com/office/drawing/2014/main" id="{D80BE439-9FA6-4E32-9B57-7B495FCAEB03}"/>
+              </a:ext>
+            </a:extLst>
+          </p:cNvPr>
+          <p:cNvSpPr txBox="1"/>
+          <p:nvPr/>
+        </p:nvSpPr>
+        <p:spPr>
+          <a:xfrm>
+            <a:off x="0" y="228599"/>
+            <a:ext cx="6112764" cy="769441"/>
+          </a:xfrm>
+          <a:prstGeom prst="rect">
+            <a:avLst/>
+          </a:prstGeom>
+          <a:noFill/>
+        </p:spPr>
+        <p:txBody>
+          <a:bodyPr wrap="none" rtlCol="0">
+            <a:spAutoFit/>
+          </a:bodyPr>
+          <a:lstStyle/>
+          <a:p>
+            <a:r>
+              <a:rPr lang="en-US" altLang="ko-KR" sz="4400"/>
+              <a:t>https://bbycroft.net/llm</a:t>
+            </a:r>
+            <a:endParaRPr lang="ko-KR" altLang="en-US" sz="4400"/>
+          </a:p>
+        </p:txBody>
+      </p:sp>
+    </p:spTree>
+    <p:extLst>
+      <p:ext uri="{BB962C8B-B14F-4D97-AF65-F5344CB8AC3E}">
+        <p14:creationId xmlns:p14="http://schemas.microsoft.com/office/powerpoint/2010/main" val="3521331228"/>
+      </p:ext>
+    </p:extLst>
+  </p:cSld>
+  <p:clrMapOvr>
+    <a:masterClrMapping/>
+  </p:clrMapOvr>
+</p:sld>
+</file>
+
+<file path=ppt/slides/slide5.xml><?xml version="1.0" encoding="utf-8"?>
+<p:sld xmlns:a="http://schemas.openxmlformats.org/drawingml/2006/main" xmlns:r="http://schemas.openxmlformats.org/officeDocument/2006/relationships" xmlns:p="http://schemas.openxmlformats.org/presentationml/2006/main">
+  <p:cSld>
+    <p:spTree>
+      <p:nvGrpSpPr>
+        <p:cNvPr id="1" name=""/>
+        <p:cNvGrpSpPr/>
+        <p:nvPr/>
+      </p:nvGrpSpPr>
+      <p:grpSpPr>
+        <a:xfrm>
+          <a:off x="0" y="0"/>
+          <a:ext cx="0" cy="0"/>
+          <a:chOff x="0" y="0"/>
+          <a:chExt cx="0" cy="0"/>
+        </a:xfrm>
+      </p:grpSpPr>
+      <p:sp>
+        <p:nvSpPr>
+          <p:cNvPr id="21" name="TextBox 20">
+            <a:extLst>
+              <a:ext uri="{FF2B5EF4-FFF2-40B4-BE49-F238E27FC236}">
+                <a16:creationId xmlns:a16="http://schemas.microsoft.com/office/drawing/2014/main" id="{23911EA7-041B-4402-8F46-2CFD0D003FEC}"/>
+              </a:ext>
+            </a:extLst>
+          </p:cNvPr>
+          <p:cNvSpPr txBox="1"/>
+          <p:nvPr/>
+        </p:nvSpPr>
+        <p:spPr>
+          <a:xfrm>
+            <a:off x="465667" y="389467"/>
+            <a:ext cx="8455969" cy="584775"/>
+          </a:xfrm>
+          <a:prstGeom prst="rect">
+            <a:avLst/>
+          </a:prstGeom>
+          <a:noFill/>
+        </p:spPr>
+        <p:txBody>
+          <a:bodyPr wrap="none" rtlCol="0">
+            <a:spAutoFit/>
+          </a:bodyPr>
+          <a:lstStyle/>
+          <a:p>
+            <a:r>
+              <a:rPr lang="en-US" altLang="ko-KR" sz="3200"/>
+              <a:t>https://github.com/</a:t>
+            </a:r>
+            <a:r>
+              <a:rPr lang="en-US" altLang="ko-KR" sz="3200">
+                <a:solidFill>
+                  <a:srgbClr val="FF0000"/>
+                </a:solidFill>
+              </a:rPr>
+              <a:t>imguru-mooc</a:t>
+            </a:r>
+            <a:r>
+              <a:rPr lang="en-US" altLang="ko-KR" sz="3200"/>
+              <a:t>/</a:t>
+            </a:r>
+            <a:r>
+              <a:rPr lang="en-US" altLang="ko-KR" sz="3200">
+                <a:solidFill>
+                  <a:schemeClr val="accent1"/>
+                </a:solidFill>
+              </a:rPr>
+              <a:t>stack_test</a:t>
+            </a:r>
+            <a:r>
+              <a:rPr lang="en-US" altLang="ko-KR" sz="3200"/>
+              <a:t>/</a:t>
+            </a:r>
+            <a:endParaRPr lang="ko-KR" altLang="en-US" sz="3200"/>
+          </a:p>
+        </p:txBody>
+      </p:sp>
+      <p:sp>
+        <p:nvSpPr>
+          <p:cNvPr id="22" name="TextBox 21">
+            <a:extLst>
+              <a:ext uri="{FF2B5EF4-FFF2-40B4-BE49-F238E27FC236}">
+                <a16:creationId xmlns:a16="http://schemas.microsoft.com/office/drawing/2014/main" id="{449C8AC0-3E54-4975-9DEE-48CD19026C0C}"/>
+              </a:ext>
+            </a:extLst>
+          </p:cNvPr>
+          <p:cNvSpPr txBox="1"/>
+          <p:nvPr/>
+        </p:nvSpPr>
+        <p:spPr>
+          <a:xfrm>
+            <a:off x="465666" y="1769534"/>
+            <a:ext cx="9956572" cy="584775"/>
+          </a:xfrm>
+          <a:prstGeom prst="rect">
+            <a:avLst/>
+          </a:prstGeom>
+          <a:noFill/>
+        </p:spPr>
+        <p:txBody>
+          <a:bodyPr wrap="none" rtlCol="0">
+            <a:spAutoFit/>
+          </a:bodyPr>
+          <a:lstStyle/>
+          <a:p>
+            <a:r>
+              <a:rPr lang="en-US" altLang="ko-KR" sz="3200"/>
+              <a:t>https://</a:t>
+            </a:r>
+            <a:r>
+              <a:rPr lang="en-US" altLang="ko-KR" sz="3200">
+                <a:solidFill>
+                  <a:srgbClr val="FF0000"/>
+                </a:solidFill>
+              </a:rPr>
+              <a:t>imguru-mooc.</a:t>
+            </a:r>
+            <a:r>
+              <a:rPr lang="en-US" altLang="ko-KR" sz="3200"/>
+              <a:t>github.io/</a:t>
+            </a:r>
+            <a:r>
+              <a:rPr lang="en-US" altLang="ko-KR" sz="3200">
+                <a:solidFill>
+                  <a:schemeClr val="accent1"/>
+                </a:solidFill>
+              </a:rPr>
+              <a:t>stack_test</a:t>
+            </a:r>
+            <a:r>
+              <a:rPr lang="en-US" altLang="ko-KR" sz="3200"/>
+              <a:t>/stack.html</a:t>
+            </a:r>
+            <a:endParaRPr lang="ko-KR" altLang="en-US" sz="3200"/>
+          </a:p>
+        </p:txBody>
+      </p:sp>
+      <p:cxnSp>
+        <p:nvCxnSpPr>
+          <p:cNvPr id="24" name="직선 화살표 연결선 23">
+            <a:extLst>
+              <a:ext uri="{FF2B5EF4-FFF2-40B4-BE49-F238E27FC236}">
+                <a16:creationId xmlns:a16="http://schemas.microsoft.com/office/drawing/2014/main" id="{C74465B0-77A0-4407-BCF4-51B561A5E5F7}"/>
+              </a:ext>
+            </a:extLst>
+          </p:cNvPr>
+          <p:cNvCxnSpPr/>
+          <p:nvPr/>
+        </p:nvCxnSpPr>
+        <p:spPr>
+          <a:xfrm flipH="1">
+            <a:off x="3141133" y="821267"/>
+            <a:ext cx="2235200" cy="1058333"/>
+          </a:xfrm>
+          <a:prstGeom prst="straightConnector1">
+            <a:avLst/>
+          </a:prstGeom>
+          <a:ln>
+            <a:tailEnd type="triangle"/>
+          </a:ln>
+        </p:spPr>
+        <p:style>
+          <a:lnRef idx="1">
+            <a:schemeClr val="accent1"/>
+          </a:lnRef>
+          <a:fillRef idx="0">
+            <a:schemeClr val="accent1"/>
+          </a:fillRef>
+          <a:effectRef idx="0">
+            <a:schemeClr val="accent1"/>
+          </a:effectRef>
+          <a:fontRef idx="minor">
+            <a:schemeClr val="tx1"/>
+          </a:fontRef>
+        </p:style>
+      </p:cxnSp>
+    </p:spTree>
+    <p:extLst>
+      <p:ext uri="{BB962C8B-B14F-4D97-AF65-F5344CB8AC3E}">
+        <p14:creationId xmlns:p14="http://schemas.microsoft.com/office/powerpoint/2010/main" val="3725945141"/>
+      </p:ext>
+    </p:extLst>
+  </p:cSld>
+  <p:clrMapOvr>
+    <a:masterClrMapping/>
+  </p:clrMapOvr>
+</p:sld>
+</file>
+
+<file path=ppt/slides/slide6.xml><?xml version="1.0" encoding="utf-8"?>
+<p:sld xmlns:a="http://schemas.openxmlformats.org/drawingml/2006/main" xmlns:r="http://schemas.openxmlformats.org/officeDocument/2006/relationships" xmlns:p="http://schemas.openxmlformats.org/presentationml/2006/main">
+  <p:cSld>
+    <p:spTree>
+      <p:nvGrpSpPr>
+        <p:cNvPr id="1" name=""/>
+        <p:cNvGrpSpPr/>
+        <p:nvPr/>
+      </p:nvGrpSpPr>
+      <p:grpSpPr>
+        <a:xfrm>
+          <a:off x="0" y="0"/>
+          <a:ext cx="0" cy="0"/>
+          <a:chOff x="0" y="0"/>
+          <a:chExt cx="0" cy="0"/>
+        </a:xfrm>
+      </p:grpSpPr>
+      <p:sp>
+        <p:nvSpPr>
+          <p:cNvPr id="4" name="TextBox 3">
+            <a:extLst>
+              <a:ext uri="{FF2B5EF4-FFF2-40B4-BE49-F238E27FC236}">
+                <a16:creationId xmlns:a16="http://schemas.microsoft.com/office/drawing/2014/main" id="{7C827DDD-9C0D-485D-A18D-6A73CF3281E0}"/>
+              </a:ext>
+            </a:extLst>
+          </p:cNvPr>
+          <p:cNvSpPr txBox="1"/>
+          <p:nvPr/>
+        </p:nvSpPr>
+        <p:spPr>
+          <a:xfrm>
+            <a:off x="745067" y="364066"/>
+            <a:ext cx="3259226" cy="5909310"/>
+          </a:xfrm>
+          <a:prstGeom prst="rect">
+            <a:avLst/>
+          </a:prstGeom>
+          <a:noFill/>
+        </p:spPr>
+        <p:txBody>
+          <a:bodyPr wrap="none" rtlCol="0">
+            <a:spAutoFit/>
+          </a:bodyPr>
+          <a:lstStyle/>
+          <a:p>
+            <a:r>
+              <a:rPr lang="en-US" altLang="ko-KR"/>
+              <a:t>typedef struct _node</a:t>
+            </a:r>
+          </a:p>
+          <a:p>
+            <a:r>
+              <a:rPr lang="en-US" altLang="ko-KR"/>
+              <a:t>{</a:t>
+            </a:r>
+          </a:p>
+          <a:p>
+            <a:r>
+              <a:rPr lang="en-US" altLang="ko-KR"/>
+              <a:t>    int data;</a:t>
+            </a:r>
+          </a:p>
+          <a:p>
+            <a:r>
+              <a:rPr lang="en-US" altLang="ko-KR"/>
+              <a:t>    struct _node *next;</a:t>
+            </a:r>
+          </a:p>
+          <a:p>
+            <a:r>
+              <a:rPr lang="en-US" altLang="ko-KR"/>
+              <a:t>}  NODE;</a:t>
+            </a:r>
+          </a:p>
+          <a:p>
+            <a:endParaRPr lang="en-US" altLang="ko-KR"/>
+          </a:p>
+          <a:p>
+            <a:r>
+              <a:rPr lang="en-US" altLang="ko-KR"/>
+              <a:t>void insert_node(int data)</a:t>
+            </a:r>
+          </a:p>
+          <a:p>
+            <a:r>
+              <a:rPr lang="en-US" altLang="ko-KR"/>
+              <a:t>{</a:t>
+            </a:r>
+          </a:p>
+          <a:p>
+            <a:r>
+              <a:rPr lang="en-US" altLang="ko-KR"/>
+              <a:t>    temp = malloc(sizeof(int));</a:t>
+            </a:r>
+          </a:p>
+          <a:p>
+            <a:r>
+              <a:rPr lang="en-US" altLang="ko-KR"/>
+              <a:t>    temp-&gt;data = data;</a:t>
+            </a:r>
+          </a:p>
+          <a:p>
+            <a:r>
+              <a:rPr lang="en-US" altLang="ko-KR"/>
+              <a:t>    temp-&gt;next = head;</a:t>
+            </a:r>
+          </a:p>
+          <a:p>
+            <a:r>
+              <a:rPr lang="en-US" altLang="ko-KR"/>
+              <a:t>    head = temp;</a:t>
+            </a:r>
+          </a:p>
+          <a:p>
+            <a:r>
+              <a:rPr lang="en-US" altLang="ko-KR"/>
+              <a:t>}</a:t>
+            </a:r>
+          </a:p>
+          <a:p>
+            <a:endParaRPr lang="en-US" altLang="ko-KR"/>
+          </a:p>
+          <a:p>
+            <a:r>
+              <a:rPr lang="en-US" altLang="ko-KR"/>
+              <a:t>NODE head;</a:t>
+            </a:r>
+          </a:p>
+          <a:p>
+            <a:endParaRPr lang="en-US" altLang="ko-KR"/>
+          </a:p>
+          <a:p>
+            <a:r>
+              <a:rPr lang="en-US" altLang="ko-KR"/>
+              <a:t>int main()</a:t>
+            </a:r>
+          </a:p>
+          <a:p>
+            <a:r>
+              <a:rPr lang="en-US" altLang="ko-KR"/>
+              <a:t>{</a:t>
+            </a:r>
+          </a:p>
+          <a:p>
+            <a:r>
+              <a:rPr lang="en-US" altLang="ko-KR"/>
+              <a:t>    insert_node(1);</a:t>
+            </a:r>
+          </a:p>
+          <a:p>
+            <a:r>
+              <a:rPr lang="en-US" altLang="ko-KR"/>
+              <a:t>    return 0;</a:t>
+            </a:r>
+          </a:p>
+          <a:p>
+            <a:r>
+              <a:rPr lang="en-US" altLang="ko-KR"/>
+              <a:t>}</a:t>
+            </a:r>
+          </a:p>
+        </p:txBody>
+      </p:sp>
+      <p:sp>
+        <p:nvSpPr>
+          <p:cNvPr id="5" name="직사각형 4">
+            <a:extLst>
+              <a:ext uri="{FF2B5EF4-FFF2-40B4-BE49-F238E27FC236}">
+                <a16:creationId xmlns:a16="http://schemas.microsoft.com/office/drawing/2014/main" id="{05604F87-6B13-402E-93F8-7AD9F7B836A2}"/>
+              </a:ext>
+            </a:extLst>
+          </p:cNvPr>
+          <p:cNvSpPr/>
+          <p:nvPr/>
+        </p:nvSpPr>
+        <p:spPr>
+          <a:xfrm>
+            <a:off x="7010400" y="2088064"/>
+            <a:ext cx="508000" cy="508000"/>
+          </a:xfrm>
+          <a:prstGeom prst="rect">
+            <a:avLst/>
+          </a:prstGeom>
+          <a:solidFill>
+            <a:srgbClr val="FFC000"/>
+          </a:solidFill>
+        </p:spPr>
+        <p:style>
+          <a:lnRef idx="2">
+            <a:schemeClr val="accent1">
+              <a:shade val="50000"/>
+            </a:schemeClr>
+          </a:lnRef>
+          <a:fillRef idx="1">
+            <a:schemeClr val="accent1"/>
+          </a:fillRef>
+          <a:effectRef idx="0">
+            <a:schemeClr val="accent1"/>
+          </a:effectRef>
+          <a:fontRef idx="minor">
+            <a:schemeClr val="lt1"/>
+          </a:fontRef>
+        </p:style>
+        <p:txBody>
+          <a:bodyPr rtlCol="0" anchor="ctr"/>
+          <a:lstStyle/>
+          <a:p>
+            <a:pPr algn="ctr"/>
+            <a:r>
+              <a:rPr lang="en-US" altLang="ko-KR">
+                <a:solidFill>
+                  <a:schemeClr val="tx1"/>
+                </a:solidFill>
+              </a:rPr>
+              <a:t>1</a:t>
+            </a:r>
+            <a:endParaRPr lang="ko-KR" altLang="en-US">
+              <a:solidFill>
+                <a:schemeClr val="tx1"/>
+              </a:solidFill>
+            </a:endParaRPr>
+          </a:p>
+        </p:txBody>
+      </p:sp>
+      <p:sp>
+        <p:nvSpPr>
+          <p:cNvPr id="6" name="직사각형 5">
+            <a:extLst>
+              <a:ext uri="{FF2B5EF4-FFF2-40B4-BE49-F238E27FC236}">
+                <a16:creationId xmlns:a16="http://schemas.microsoft.com/office/drawing/2014/main" id="{41BE7706-C13E-44D1-BB42-084D57294BA5}"/>
+              </a:ext>
+            </a:extLst>
+          </p:cNvPr>
+          <p:cNvSpPr/>
+          <p:nvPr/>
+        </p:nvSpPr>
+        <p:spPr>
+          <a:xfrm>
+            <a:off x="7518400" y="2088064"/>
+            <a:ext cx="508000" cy="508000"/>
+          </a:xfrm>
+          <a:prstGeom prst="rect">
+            <a:avLst/>
+          </a:prstGeom>
+          <a:solidFill>
+            <a:srgbClr val="FFFF00"/>
+          </a:solidFill>
+        </p:spPr>
+        <p:style>
+          <a:lnRef idx="2">
+            <a:schemeClr val="accent1">
+              <a:shade val="50000"/>
+            </a:schemeClr>
+          </a:lnRef>
+          <a:fillRef idx="1">
+            <a:schemeClr val="accent1"/>
+          </a:fillRef>
+          <a:effectRef idx="0">
+            <a:schemeClr val="accent1"/>
+          </a:effectRef>
+          <a:fontRef idx="minor">
+            <a:schemeClr val="lt1"/>
+          </a:fontRef>
+        </p:style>
+        <p:txBody>
+          <a:bodyPr rtlCol="0" anchor="ctr"/>
+          <a:lstStyle/>
+          <a:p>
+            <a:pPr algn="ctr"/>
+            <a:r>
+              <a:rPr lang="en-US" altLang="ko-KR">
+                <a:solidFill>
+                  <a:schemeClr val="tx1"/>
+                </a:solidFill>
+              </a:rPr>
+              <a:t>0</a:t>
+            </a:r>
+            <a:endParaRPr lang="ko-KR" altLang="en-US">
+              <a:solidFill>
+                <a:schemeClr val="tx1"/>
+              </a:solidFill>
+            </a:endParaRPr>
+          </a:p>
+        </p:txBody>
+      </p:sp>
+      <p:sp>
+        <p:nvSpPr>
+          <p:cNvPr id="13" name="직사각형 12">
+            <a:extLst>
+              <a:ext uri="{FF2B5EF4-FFF2-40B4-BE49-F238E27FC236}">
+                <a16:creationId xmlns:a16="http://schemas.microsoft.com/office/drawing/2014/main" id="{E92565CA-2E57-4082-A50E-A8956ED57401}"/>
+              </a:ext>
+            </a:extLst>
+          </p:cNvPr>
+          <p:cNvSpPr/>
+          <p:nvPr/>
+        </p:nvSpPr>
+        <p:spPr>
+          <a:xfrm>
+            <a:off x="5842000" y="2088064"/>
+            <a:ext cx="508000" cy="508000"/>
+          </a:xfrm>
+          <a:prstGeom prst="rect">
+            <a:avLst/>
+          </a:prstGeom>
+          <a:solidFill>
+            <a:srgbClr val="FFFF00"/>
+          </a:solidFill>
+        </p:spPr>
+        <p:style>
+          <a:lnRef idx="2">
+            <a:schemeClr val="accent1">
+              <a:shade val="50000"/>
+            </a:schemeClr>
+          </a:lnRef>
+          <a:fillRef idx="1">
+            <a:schemeClr val="accent1"/>
+          </a:fillRef>
+          <a:effectRef idx="0">
+            <a:schemeClr val="accent1"/>
+          </a:effectRef>
+          <a:fontRef idx="minor">
+            <a:schemeClr val="lt1"/>
+          </a:fontRef>
+        </p:style>
+        <p:txBody>
+          <a:bodyPr rtlCol="0" anchor="ctr"/>
+          <a:lstStyle/>
+          <a:p>
+            <a:pPr algn="ctr"/>
+            <a:endParaRPr lang="ko-KR" altLang="en-US">
+              <a:solidFill>
+                <a:schemeClr val="tx1"/>
+              </a:solidFill>
+            </a:endParaRPr>
+          </a:p>
+        </p:txBody>
+      </p:sp>
+      <p:sp>
+        <p:nvSpPr>
+          <p:cNvPr id="14" name="TextBox 13">
+            <a:extLst>
+              <a:ext uri="{FF2B5EF4-FFF2-40B4-BE49-F238E27FC236}">
+                <a16:creationId xmlns:a16="http://schemas.microsoft.com/office/drawing/2014/main" id="{30D14320-CA57-4571-84DF-587C360AB56D}"/>
+              </a:ext>
+            </a:extLst>
+          </p:cNvPr>
+          <p:cNvSpPr txBox="1"/>
+          <p:nvPr/>
+        </p:nvSpPr>
+        <p:spPr>
+          <a:xfrm>
+            <a:off x="5765801" y="1729831"/>
+            <a:ext cx="700833" cy="369332"/>
+          </a:xfrm>
+          <a:prstGeom prst="rect">
+            <a:avLst/>
+          </a:prstGeom>
+          <a:noFill/>
+        </p:spPr>
+        <p:txBody>
+          <a:bodyPr wrap="none" rtlCol="0">
+            <a:spAutoFit/>
+          </a:bodyPr>
+          <a:lstStyle/>
+          <a:p>
+            <a:r>
+              <a:rPr lang="en-US" altLang="ko-KR"/>
+              <a:t>head</a:t>
+            </a:r>
+            <a:endParaRPr lang="ko-KR" altLang="en-US"/>
+          </a:p>
+        </p:txBody>
+      </p:sp>
+      <p:cxnSp>
+        <p:nvCxnSpPr>
+          <p:cNvPr id="15" name="직선 화살표 연결선 14">
+            <a:extLst>
+              <a:ext uri="{FF2B5EF4-FFF2-40B4-BE49-F238E27FC236}">
+                <a16:creationId xmlns:a16="http://schemas.microsoft.com/office/drawing/2014/main" id="{CA1B9BF7-86AD-4B22-9F00-FDF9AE41CFD8}"/>
+              </a:ext>
+            </a:extLst>
+          </p:cNvPr>
+          <p:cNvCxnSpPr>
+            <a:cxnSpLocks/>
+            <a:stCxn id="13" idx="3"/>
+            <a:endCxn id="5" idx="1"/>
+          </p:cNvCxnSpPr>
+          <p:nvPr/>
+        </p:nvCxnSpPr>
+        <p:spPr>
+          <a:xfrm>
+            <a:off x="6350000" y="2342064"/>
+            <a:ext cx="660400" cy="0"/>
+          </a:xfrm>
+          <a:prstGeom prst="straightConnector1">
+            <a:avLst/>
+          </a:prstGeom>
+          <a:ln>
+            <a:tailEnd type="triangle"/>
+          </a:ln>
+        </p:spPr>
+        <p:style>
+          <a:lnRef idx="1">
+            <a:schemeClr val="accent1"/>
+          </a:lnRef>
+          <a:fillRef idx="0">
+            <a:schemeClr val="accent1"/>
+          </a:fillRef>
+          <a:effectRef idx="0">
+            <a:schemeClr val="accent1"/>
+          </a:effectRef>
+          <a:fontRef idx="minor">
+            <a:schemeClr val="tx1"/>
+          </a:fontRef>
+        </p:style>
+      </p:cxnSp>
+    </p:spTree>
+    <p:extLst>
+      <p:ext uri="{BB962C8B-B14F-4D97-AF65-F5344CB8AC3E}">
+        <p14:creationId xmlns:p14="http://schemas.microsoft.com/office/powerpoint/2010/main" val="3283130501"/>
+      </p:ext>
+    </p:extLst>
+  </p:cSld>
+  <p:clrMapOvr>
+    <a:masterClrMapping/>
+  </p:clrMapOvr>
+</p:sld>
+</file>
+
+<file path=ppt/slides/slide7.xml><?xml version="1.0" encoding="utf-8"?>
+<p:sld xmlns:a="http://schemas.openxmlformats.org/drawingml/2006/main" xmlns:r="http://schemas.openxmlformats.org/officeDocument/2006/relationships" xmlns:p="http://schemas.openxmlformats.org/presentationml/2006/main">
+  <p:cSld>
+    <p:spTree>
+      <p:nvGrpSpPr>
+        <p:cNvPr id="1" name=""/>
+        <p:cNvGrpSpPr/>
+        <p:nvPr/>
+      </p:nvGrpSpPr>
+      <p:grpSpPr>
+        <a:xfrm>
+          <a:off x="0" y="0"/>
+          <a:ext cx="0" cy="0"/>
+          <a:chOff x="0" y="0"/>
+          <a:chExt cx="0" cy="0"/>
+        </a:xfrm>
+      </p:grpSpPr>
+      <p:sp>
+        <p:nvSpPr>
+          <p:cNvPr id="22" name="TextBox 21">
+            <a:extLst>
+              <a:ext uri="{FF2B5EF4-FFF2-40B4-BE49-F238E27FC236}">
+                <a16:creationId xmlns:a16="http://schemas.microsoft.com/office/drawing/2014/main" id="{449C8AC0-3E54-4975-9DEE-48CD19026C0C}"/>
+              </a:ext>
+            </a:extLst>
+          </p:cNvPr>
+          <p:cNvSpPr txBox="1"/>
+          <p:nvPr/>
+        </p:nvSpPr>
+        <p:spPr>
+          <a:xfrm>
+            <a:off x="541866" y="304801"/>
+            <a:ext cx="10188879" cy="584775"/>
+          </a:xfrm>
+          <a:prstGeom prst="rect">
+            <a:avLst/>
+          </a:prstGeom>
+          <a:noFill/>
+        </p:spPr>
+        <p:txBody>
+          <a:bodyPr wrap="none" rtlCol="0">
+            <a:spAutoFit/>
+          </a:bodyPr>
+          <a:lstStyle/>
+          <a:p>
+            <a:r>
+              <a:rPr lang="en-US" altLang="ko-KR" sz="3200"/>
+              <a:t>https://</a:t>
+            </a:r>
+            <a:r>
+              <a:rPr lang="en-US" altLang="ko-KR" sz="3200">
+                <a:solidFill>
+                  <a:srgbClr val="FF0000"/>
+                </a:solidFill>
+              </a:rPr>
+              <a:t>imguru-mooc.</a:t>
+            </a:r>
+            <a:r>
+              <a:rPr lang="en-US" altLang="ko-KR" sz="3200"/>
+              <a:t>github.io/</a:t>
+            </a:r>
+            <a:r>
+              <a:rPr lang="en-US" altLang="ko-KR" sz="3200" b="1" i="0" u="none" strike="noStrike">
+                <a:solidFill>
+                  <a:srgbClr val="0969DA"/>
+                </a:solidFill>
+                <a:effectLst/>
+                <a:latin typeface="Mona Sans VF"/>
+                <a:hlinkClick r:id="rId2"/>
+              </a:rPr>
+              <a:t>CLAUDE_AI</a:t>
+            </a:r>
+            <a:r>
+              <a:rPr lang="en-US" altLang="ko-KR" sz="3200"/>
+              <a:t>/</a:t>
+            </a:r>
+            <a:r>
+              <a:rPr lang="en-US" altLang="ko-KR" sz="3200" b="0" i="0" u="none" strike="noStrike">
+                <a:solidFill>
+                  <a:srgbClr val="1F2328"/>
+                </a:solidFill>
+                <a:effectLst/>
+                <a:latin typeface="Mona Sans VF"/>
+                <a:hlinkClick r:id="rId3" tooltip="gesture.html"/>
+              </a:rPr>
+              <a:t>gesture.html</a:t>
+            </a:r>
+            <a:endParaRPr lang="ko-KR" altLang="en-US" sz="3200"/>
+          </a:p>
+        </p:txBody>
+      </p:sp>
+    </p:spTree>
+    <p:extLst>
+      <p:ext uri="{BB962C8B-B14F-4D97-AF65-F5344CB8AC3E}">
+        <p14:creationId xmlns:p14="http://schemas.microsoft.com/office/powerpoint/2010/main" val="3416794966"/>
+      </p:ext>
+    </p:extLst>
+  </p:cSld>
+  <p:clrMapOvr>
+    <a:masterClrMapping/>
+  </p:clrMapOvr>
+</p:sld>
+</file>
+
+<file path=ppt/slides/slide8.xml><?xml version="1.0" encoding="utf-8"?>
+<p:sld xmlns:a="http://schemas.openxmlformats.org/drawingml/2006/main" xmlns:r="http://schemas.openxmlformats.org/officeDocument/2006/relationships" xmlns:p="http://schemas.openxmlformats.org/presentationml/2006/main">
+  <p:cSld>
+    <p:spTree>
+      <p:nvGrpSpPr>
+        <p:cNvPr id="1" name=""/>
+        <p:cNvGrpSpPr/>
+        <p:nvPr/>
+      </p:nvGrpSpPr>
+      <p:grpSpPr>
+        <a:xfrm>
+          <a:off x="0" y="0"/>
+          <a:ext cx="0" cy="0"/>
+          <a:chOff x="0" y="0"/>
+          <a:chExt cx="0" cy="0"/>
+        </a:xfrm>
+      </p:grpSpPr>
+      <p:sp>
+        <p:nvSpPr>
+          <p:cNvPr id="4" name="타원 3">
+            <a:extLst>
+              <a:ext uri="{FF2B5EF4-FFF2-40B4-BE49-F238E27FC236}">
+                <a16:creationId xmlns:a16="http://schemas.microsoft.com/office/drawing/2014/main" id="{D9013E3D-643C-4192-A741-15E289BC4B5F}"/>
+              </a:ext>
+            </a:extLst>
+          </p:cNvPr>
+          <p:cNvSpPr/>
+          <p:nvPr/>
+        </p:nvSpPr>
+        <p:spPr>
+          <a:xfrm>
+            <a:off x="942959" y="3849092"/>
+            <a:ext cx="508000" cy="508000"/>
+          </a:xfrm>
+          <a:prstGeom prst="ellipse">
+            <a:avLst/>
+          </a:prstGeom>
+          <a:solidFill>
+            <a:schemeClr val="tx1"/>
+          </a:solidFill>
+        </p:spPr>
+        <p:style>
+          <a:lnRef idx="2">
+            <a:schemeClr val="accent1">
+              <a:shade val="50000"/>
+            </a:schemeClr>
+          </a:lnRef>
+          <a:fillRef idx="1">
+            <a:schemeClr val="accent1"/>
+          </a:fillRef>
+          <a:effectRef idx="0">
+            <a:schemeClr val="accent1"/>
+          </a:effectRef>
+          <a:fontRef idx="minor">
+            <a:schemeClr val="lt1"/>
+          </a:fontRef>
+        </p:style>
+        <p:txBody>
+          <a:bodyPr rtlCol="0" anchor="ctr"/>
+          <a:lstStyle/>
+          <a:p>
+            <a:pPr algn="ctr"/>
+            <a:r>
+              <a:rPr lang="en-US" altLang="ko-KR" sz="2400">
+                <a:solidFill>
+                  <a:schemeClr val="bg1"/>
+                </a:solidFill>
+              </a:rPr>
+              <a:t>1</a:t>
+            </a:r>
+            <a:endParaRPr lang="ko-KR" altLang="en-US" sz="2400">
+              <a:solidFill>
+                <a:schemeClr val="bg1"/>
+              </a:solidFill>
+            </a:endParaRPr>
+          </a:p>
+        </p:txBody>
+      </p:sp>
+      <p:sp>
+        <p:nvSpPr>
+          <p:cNvPr id="5" name="TextBox 4">
+            <a:extLst>
+              <a:ext uri="{FF2B5EF4-FFF2-40B4-BE49-F238E27FC236}">
+                <a16:creationId xmlns:a16="http://schemas.microsoft.com/office/drawing/2014/main" id="{61587B2E-95F9-4BD2-B7CC-7383206F0A1F}"/>
+              </a:ext>
+            </a:extLst>
+          </p:cNvPr>
+          <p:cNvSpPr txBox="1"/>
+          <p:nvPr/>
+        </p:nvSpPr>
+        <p:spPr>
+          <a:xfrm>
+            <a:off x="6036733" y="533400"/>
+            <a:ext cx="6057299" cy="3970318"/>
+          </a:xfrm>
+          <a:prstGeom prst="rect">
+            <a:avLst/>
+          </a:prstGeom>
+          <a:noFill/>
+        </p:spPr>
+        <p:txBody>
+          <a:bodyPr wrap="none" rtlCol="0">
+            <a:spAutoFit/>
+          </a:bodyPr>
+          <a:lstStyle/>
+          <a:p>
+            <a:r>
+              <a:rPr lang="en-US" altLang="ko-KR" sz="2800"/>
+              <a:t>1. root</a:t>
+            </a:r>
+            <a:r>
+              <a:rPr lang="ko-KR" altLang="en-US" sz="2800"/>
+              <a:t>는 언제나 검정 이다</a:t>
+            </a:r>
+            <a:r>
+              <a:rPr lang="en-US" altLang="ko-KR" sz="2800"/>
+              <a:t>.</a:t>
+            </a:r>
+          </a:p>
+          <a:p>
+            <a:r>
+              <a:rPr lang="en-US" altLang="ko-KR" sz="2800"/>
+              <a:t>2. </a:t>
+            </a:r>
+            <a:r>
+              <a:rPr lang="ko-KR" altLang="en-US" sz="2800"/>
+              <a:t>새로운 노드는 빨강 이다</a:t>
+            </a:r>
+            <a:r>
+              <a:rPr lang="en-US" altLang="ko-KR" sz="2800"/>
+              <a:t>.</a:t>
+            </a:r>
+          </a:p>
+          <a:p>
+            <a:r>
+              <a:rPr lang="en-US" altLang="ko-KR" sz="2800"/>
+              <a:t>3. </a:t>
+            </a:r>
+            <a:r>
+              <a:rPr lang="ko-KR" altLang="en-US" sz="2800"/>
+              <a:t>부모도 빨강이고 삼촌도 빨강이면</a:t>
+            </a:r>
+            <a:endParaRPr lang="en-US" altLang="ko-KR" sz="2800"/>
+          </a:p>
+          <a:p>
+            <a:r>
+              <a:rPr lang="en-US" altLang="ko-KR" sz="2800"/>
+              <a:t> color flip : gparent=&gt; RED</a:t>
+            </a:r>
+          </a:p>
+          <a:p>
+            <a:r>
+              <a:rPr lang="en-US" altLang="ko-KR" sz="2800"/>
+              <a:t>              parent,uncle</a:t>
+            </a:r>
+            <a:r>
+              <a:rPr lang="ko-KR" altLang="en-US" sz="2800"/>
+              <a:t> </a:t>
+            </a:r>
+            <a:r>
+              <a:rPr lang="en-US" altLang="ko-KR" sz="2800"/>
+              <a:t>=&gt;</a:t>
+            </a:r>
+            <a:r>
+              <a:rPr lang="ko-KR" altLang="en-US" sz="2800"/>
+              <a:t> </a:t>
+            </a:r>
+            <a:r>
+              <a:rPr lang="en-US" altLang="ko-KR" sz="2800"/>
+              <a:t>BLACK</a:t>
+            </a:r>
+          </a:p>
+          <a:p>
+            <a:r>
+              <a:rPr lang="en-US" altLang="ko-KR" sz="2800"/>
+              <a:t>4. </a:t>
+            </a:r>
+            <a:r>
+              <a:rPr lang="ko-KR" altLang="en-US" sz="2800"/>
+              <a:t>부모가 빨강이면 회전 한다</a:t>
+            </a:r>
+            <a:r>
+              <a:rPr lang="en-US" altLang="ko-KR" sz="2800"/>
+              <a:t>.</a:t>
+            </a:r>
+          </a:p>
+          <a:p>
+            <a:r>
+              <a:rPr lang="en-US" altLang="ko-KR" sz="2800"/>
+              <a:t>    R-R : rotate_left(gparent)</a:t>
+            </a:r>
+          </a:p>
+          <a:p>
+            <a:r>
+              <a:rPr lang="en-US" altLang="ko-KR" sz="2800"/>
+              <a:t>    color flip : gparent=&gt; RED</a:t>
+            </a:r>
+          </a:p>
+          <a:p>
+            <a:r>
+              <a:rPr lang="en-US" altLang="ko-KR" sz="2800"/>
+              <a:t>                   parent</a:t>
+            </a:r>
+            <a:r>
+              <a:rPr lang="ko-KR" altLang="en-US" sz="2800"/>
+              <a:t> </a:t>
+            </a:r>
+            <a:r>
+              <a:rPr lang="en-US" altLang="ko-KR" sz="2800"/>
+              <a:t>=&gt;</a:t>
+            </a:r>
+            <a:r>
+              <a:rPr lang="ko-KR" altLang="en-US" sz="2800"/>
+              <a:t> </a:t>
+            </a:r>
+            <a:r>
+              <a:rPr lang="en-US" altLang="ko-KR" sz="2800"/>
+              <a:t>BLACK</a:t>
+            </a:r>
+            <a:endParaRPr lang="ko-KR" altLang="en-US" sz="2800"/>
+          </a:p>
+        </p:txBody>
+      </p:sp>
+      <p:sp>
+        <p:nvSpPr>
+          <p:cNvPr id="6" name="타원 5">
+            <a:extLst>
+              <a:ext uri="{FF2B5EF4-FFF2-40B4-BE49-F238E27FC236}">
+                <a16:creationId xmlns:a16="http://schemas.microsoft.com/office/drawing/2014/main" id="{239E7E8B-34E6-43D4-A821-39F4F75304B1}"/>
+              </a:ext>
+            </a:extLst>
+          </p:cNvPr>
+          <p:cNvSpPr/>
+          <p:nvPr/>
+        </p:nvSpPr>
+        <p:spPr>
+          <a:xfrm>
+            <a:off x="1708828" y="2877297"/>
+            <a:ext cx="508000" cy="508000"/>
+          </a:xfrm>
+          <a:prstGeom prst="ellipse">
+            <a:avLst/>
+          </a:prstGeom>
+          <a:solidFill>
+            <a:srgbClr val="FF0000"/>
+          </a:solidFill>
+        </p:spPr>
+        <p:style>
+          <a:lnRef idx="2">
+            <a:schemeClr val="accent1">
+              <a:shade val="50000"/>
+            </a:schemeClr>
+          </a:lnRef>
+          <a:fillRef idx="1">
+            <a:schemeClr val="accent1"/>
+          </a:fillRef>
+          <a:effectRef idx="0">
+            <a:schemeClr val="accent1"/>
+          </a:effectRef>
+          <a:fontRef idx="minor">
+            <a:schemeClr val="lt1"/>
+          </a:fontRef>
+        </p:style>
+        <p:txBody>
+          <a:bodyPr rtlCol="0" anchor="ctr"/>
+          <a:lstStyle/>
+          <a:p>
+            <a:pPr algn="ctr"/>
+            <a:r>
+              <a:rPr lang="en-US" altLang="ko-KR" sz="2400">
+                <a:solidFill>
+                  <a:schemeClr val="bg1"/>
+                </a:solidFill>
+              </a:rPr>
+              <a:t>2</a:t>
+            </a:r>
+            <a:endParaRPr lang="ko-KR" altLang="en-US" sz="2400">
+              <a:solidFill>
+                <a:schemeClr val="bg1"/>
+              </a:solidFill>
+            </a:endParaRPr>
+          </a:p>
+        </p:txBody>
+      </p:sp>
+      <p:cxnSp>
+        <p:nvCxnSpPr>
+          <p:cNvPr id="8" name="직선 연결선 7">
+            <a:extLst>
+              <a:ext uri="{FF2B5EF4-FFF2-40B4-BE49-F238E27FC236}">
+                <a16:creationId xmlns:a16="http://schemas.microsoft.com/office/drawing/2014/main" id="{962CA82F-42DA-444A-8A40-9D691604828A}"/>
+              </a:ext>
+            </a:extLst>
+          </p:cNvPr>
+          <p:cNvCxnSpPr>
+            <a:cxnSpLocks/>
+            <a:stCxn id="4" idx="0"/>
+            <a:endCxn id="6" idx="3"/>
+          </p:cNvCxnSpPr>
+          <p:nvPr/>
+        </p:nvCxnSpPr>
+        <p:spPr>
+          <a:xfrm flipV="1">
+            <a:off x="1196959" y="3310902"/>
+            <a:ext cx="586264" cy="538190"/>
+          </a:xfrm>
+          <a:prstGeom prst="line">
+            <a:avLst/>
+          </a:prstGeom>
+          <a:ln>
+            <a:solidFill>
+              <a:schemeClr val="tx1"/>
+            </a:solidFill>
+          </a:ln>
+        </p:spPr>
+        <p:style>
+          <a:lnRef idx="1">
+            <a:schemeClr val="accent1"/>
+          </a:lnRef>
+          <a:fillRef idx="0">
+            <a:schemeClr val="accent1"/>
+          </a:fillRef>
+          <a:effectRef idx="0">
+            <a:schemeClr val="accent1"/>
+          </a:effectRef>
+          <a:fontRef idx="minor">
+            <a:schemeClr val="tx1"/>
+          </a:fontRef>
+        </p:style>
+      </p:cxnSp>
+      <p:sp>
+        <p:nvSpPr>
+          <p:cNvPr id="11" name="타원 10">
+            <a:extLst>
+              <a:ext uri="{FF2B5EF4-FFF2-40B4-BE49-F238E27FC236}">
+                <a16:creationId xmlns:a16="http://schemas.microsoft.com/office/drawing/2014/main" id="{C29D52B1-880B-4E01-B6FF-2C007987C899}"/>
+              </a:ext>
+            </a:extLst>
+          </p:cNvPr>
+          <p:cNvSpPr/>
+          <p:nvPr/>
+        </p:nvSpPr>
+        <p:spPr>
+          <a:xfrm>
+            <a:off x="2331891" y="3798495"/>
+            <a:ext cx="508000" cy="508000"/>
+          </a:xfrm>
+          <a:prstGeom prst="ellipse">
+            <a:avLst/>
+          </a:prstGeom>
+          <a:solidFill>
+            <a:schemeClr val="tx1"/>
+          </a:solidFill>
+        </p:spPr>
+        <p:style>
+          <a:lnRef idx="2">
+            <a:schemeClr val="accent1">
+              <a:shade val="50000"/>
+            </a:schemeClr>
+          </a:lnRef>
+          <a:fillRef idx="1">
+            <a:schemeClr val="accent1"/>
+          </a:fillRef>
+          <a:effectRef idx="0">
+            <a:schemeClr val="accent1"/>
+          </a:effectRef>
+          <a:fontRef idx="minor">
+            <a:schemeClr val="lt1"/>
+          </a:fontRef>
+        </p:style>
+        <p:txBody>
+          <a:bodyPr rtlCol="0" anchor="ctr"/>
+          <a:lstStyle/>
+          <a:p>
+            <a:pPr algn="ctr"/>
+            <a:r>
+              <a:rPr lang="en-US" altLang="ko-KR" sz="2400">
+                <a:solidFill>
+                  <a:schemeClr val="bg1"/>
+                </a:solidFill>
+              </a:rPr>
+              <a:t>3</a:t>
+            </a:r>
+            <a:endParaRPr lang="ko-KR" altLang="en-US" sz="2400">
+              <a:solidFill>
+                <a:schemeClr val="bg1"/>
+              </a:solidFill>
+            </a:endParaRPr>
+          </a:p>
+        </p:txBody>
+      </p:sp>
+      <p:cxnSp>
+        <p:nvCxnSpPr>
+          <p:cNvPr id="12" name="직선 연결선 11">
+            <a:extLst>
+              <a:ext uri="{FF2B5EF4-FFF2-40B4-BE49-F238E27FC236}">
+                <a16:creationId xmlns:a16="http://schemas.microsoft.com/office/drawing/2014/main" id="{1A525EAC-9322-4348-B308-EB2C604C54D4}"/>
+              </a:ext>
+            </a:extLst>
+          </p:cNvPr>
+          <p:cNvCxnSpPr>
+            <a:cxnSpLocks/>
+            <a:stCxn id="6" idx="0"/>
+            <a:endCxn id="24" idx="3"/>
+          </p:cNvCxnSpPr>
+          <p:nvPr/>
+        </p:nvCxnSpPr>
+        <p:spPr>
+          <a:xfrm flipV="1">
+            <a:off x="1962828" y="2453751"/>
+            <a:ext cx="1045891" cy="423546"/>
+          </a:xfrm>
+          <a:prstGeom prst="line">
+            <a:avLst/>
+          </a:prstGeom>
+          <a:ln>
+            <a:solidFill>
+              <a:schemeClr val="tx1"/>
+            </a:solidFill>
+          </a:ln>
+        </p:spPr>
+        <p:style>
+          <a:lnRef idx="1">
+            <a:schemeClr val="accent1"/>
+          </a:lnRef>
+          <a:fillRef idx="0">
+            <a:schemeClr val="accent1"/>
+          </a:fillRef>
+          <a:effectRef idx="0">
+            <a:schemeClr val="accent1"/>
+          </a:effectRef>
+          <a:fontRef idx="minor">
+            <a:schemeClr val="tx1"/>
+          </a:fontRef>
+        </p:style>
+      </p:cxnSp>
+      <p:sp>
+        <p:nvSpPr>
+          <p:cNvPr id="24" name="타원 23">
+            <a:extLst>
+              <a:ext uri="{FF2B5EF4-FFF2-40B4-BE49-F238E27FC236}">
+                <a16:creationId xmlns:a16="http://schemas.microsoft.com/office/drawing/2014/main" id="{90224118-8686-4CD4-B20B-048B45557F9B}"/>
+              </a:ext>
+            </a:extLst>
+          </p:cNvPr>
+          <p:cNvSpPr/>
+          <p:nvPr/>
+        </p:nvSpPr>
+        <p:spPr>
+          <a:xfrm>
+            <a:off x="2934324" y="2020146"/>
+            <a:ext cx="508000" cy="508000"/>
+          </a:xfrm>
+          <a:prstGeom prst="ellipse">
+            <a:avLst/>
+          </a:prstGeom>
+          <a:solidFill>
+            <a:schemeClr val="tx1"/>
+          </a:solidFill>
+        </p:spPr>
+        <p:style>
+          <a:lnRef idx="2">
+            <a:schemeClr val="accent1">
+              <a:shade val="50000"/>
+            </a:schemeClr>
+          </a:lnRef>
+          <a:fillRef idx="1">
+            <a:schemeClr val="accent1"/>
+          </a:fillRef>
+          <a:effectRef idx="0">
+            <a:schemeClr val="accent1"/>
+          </a:effectRef>
+          <a:fontRef idx="minor">
+            <a:schemeClr val="lt1"/>
+          </a:fontRef>
+        </p:style>
+        <p:txBody>
+          <a:bodyPr rtlCol="0" anchor="ctr"/>
+          <a:lstStyle/>
+          <a:p>
+            <a:pPr algn="ctr"/>
+            <a:r>
+              <a:rPr lang="en-US" altLang="ko-KR" sz="2400">
+                <a:solidFill>
+                  <a:schemeClr val="bg1"/>
+                </a:solidFill>
+              </a:rPr>
+              <a:t>4</a:t>
+            </a:r>
+            <a:endParaRPr lang="ko-KR" altLang="en-US" sz="2400">
+              <a:solidFill>
+                <a:schemeClr val="bg1"/>
+              </a:solidFill>
+            </a:endParaRPr>
+          </a:p>
+        </p:txBody>
+      </p:sp>
+      <p:cxnSp>
+        <p:nvCxnSpPr>
+          <p:cNvPr id="25" name="직선 연결선 24">
+            <a:extLst>
+              <a:ext uri="{FF2B5EF4-FFF2-40B4-BE49-F238E27FC236}">
+                <a16:creationId xmlns:a16="http://schemas.microsoft.com/office/drawing/2014/main" id="{0B22F87A-4AEA-40DE-9920-7D5EF130E45C}"/>
+              </a:ext>
+            </a:extLst>
+          </p:cNvPr>
+          <p:cNvCxnSpPr>
+            <a:cxnSpLocks/>
+            <a:stCxn id="11" idx="0"/>
+            <a:endCxn id="6" idx="5"/>
+          </p:cNvCxnSpPr>
+          <p:nvPr/>
+        </p:nvCxnSpPr>
+        <p:spPr>
+          <a:xfrm flipH="1" flipV="1">
+            <a:off x="2142433" y="3310902"/>
+            <a:ext cx="443458" cy="487593"/>
+          </a:xfrm>
+          <a:prstGeom prst="line">
+            <a:avLst/>
+          </a:prstGeom>
+          <a:ln>
+            <a:solidFill>
+              <a:schemeClr val="tx1"/>
+            </a:solidFill>
+          </a:ln>
+        </p:spPr>
+        <p:style>
+          <a:lnRef idx="1">
+            <a:schemeClr val="accent1"/>
+          </a:lnRef>
+          <a:fillRef idx="0">
+            <a:schemeClr val="accent1"/>
+          </a:fillRef>
+          <a:effectRef idx="0">
+            <a:schemeClr val="accent1"/>
+          </a:effectRef>
+          <a:fontRef idx="minor">
+            <a:schemeClr val="tx1"/>
+          </a:fontRef>
+        </p:style>
+      </p:cxnSp>
+      <p:sp>
+        <p:nvSpPr>
+          <p:cNvPr id="36" name="타원 35">
+            <a:extLst>
+              <a:ext uri="{FF2B5EF4-FFF2-40B4-BE49-F238E27FC236}">
+                <a16:creationId xmlns:a16="http://schemas.microsoft.com/office/drawing/2014/main" id="{CECE89A0-B40C-499C-94F3-C0D31D187443}"/>
+              </a:ext>
+            </a:extLst>
+          </p:cNvPr>
+          <p:cNvSpPr/>
+          <p:nvPr/>
+        </p:nvSpPr>
+        <p:spPr>
+          <a:xfrm>
+            <a:off x="3587559" y="3777111"/>
+            <a:ext cx="508000" cy="508000"/>
+          </a:xfrm>
+          <a:prstGeom prst="ellipse">
+            <a:avLst/>
+          </a:prstGeom>
+          <a:solidFill>
+            <a:schemeClr val="tx1"/>
+          </a:solidFill>
+        </p:spPr>
+        <p:style>
+          <a:lnRef idx="2">
+            <a:schemeClr val="accent1">
+              <a:shade val="50000"/>
+            </a:schemeClr>
+          </a:lnRef>
+          <a:fillRef idx="1">
+            <a:schemeClr val="accent1"/>
+          </a:fillRef>
+          <a:effectRef idx="0">
+            <a:schemeClr val="accent1"/>
+          </a:effectRef>
+          <a:fontRef idx="minor">
+            <a:schemeClr val="lt1"/>
+          </a:fontRef>
+        </p:style>
+        <p:txBody>
+          <a:bodyPr rtlCol="0" anchor="ctr"/>
+          <a:lstStyle/>
+          <a:p>
+            <a:pPr algn="ctr"/>
+            <a:r>
+              <a:rPr lang="en-US" altLang="ko-KR" sz="2400">
+                <a:solidFill>
+                  <a:schemeClr val="bg1"/>
+                </a:solidFill>
+              </a:rPr>
+              <a:t>5</a:t>
+            </a:r>
+            <a:endParaRPr lang="ko-KR" altLang="en-US" sz="2400">
+              <a:solidFill>
+                <a:schemeClr val="bg1"/>
+              </a:solidFill>
+            </a:endParaRPr>
+          </a:p>
+        </p:txBody>
+      </p:sp>
+      <p:cxnSp>
+        <p:nvCxnSpPr>
+          <p:cNvPr id="37" name="직선 연결선 36">
+            <a:extLst>
+              <a:ext uri="{FF2B5EF4-FFF2-40B4-BE49-F238E27FC236}">
+                <a16:creationId xmlns:a16="http://schemas.microsoft.com/office/drawing/2014/main" id="{8193D402-7827-47BD-B1F5-14055C4F583C}"/>
+              </a:ext>
+            </a:extLst>
+          </p:cNvPr>
+          <p:cNvCxnSpPr>
+            <a:cxnSpLocks/>
+            <a:stCxn id="24" idx="5"/>
+            <a:endCxn id="53" idx="0"/>
+          </p:cNvCxnSpPr>
+          <p:nvPr/>
+        </p:nvCxnSpPr>
+        <p:spPr>
+          <a:xfrm>
+            <a:off x="3367929" y="2453751"/>
+            <a:ext cx="1159136" cy="444495"/>
+          </a:xfrm>
+          <a:prstGeom prst="line">
+            <a:avLst/>
+          </a:prstGeom>
+          <a:ln>
+            <a:solidFill>
+              <a:schemeClr val="tx1"/>
+            </a:solidFill>
+          </a:ln>
+        </p:spPr>
+        <p:style>
+          <a:lnRef idx="1">
+            <a:schemeClr val="accent1"/>
+          </a:lnRef>
+          <a:fillRef idx="0">
+            <a:schemeClr val="accent1"/>
+          </a:fillRef>
+          <a:effectRef idx="0">
+            <a:schemeClr val="accent1"/>
+          </a:effectRef>
+          <a:fontRef idx="minor">
+            <a:schemeClr val="tx1"/>
+          </a:fontRef>
+        </p:style>
+      </p:cxnSp>
+      <p:sp>
+        <p:nvSpPr>
+          <p:cNvPr id="53" name="타원 52">
+            <a:extLst>
+              <a:ext uri="{FF2B5EF4-FFF2-40B4-BE49-F238E27FC236}">
+                <a16:creationId xmlns:a16="http://schemas.microsoft.com/office/drawing/2014/main" id="{E44E7348-C9A7-437A-96A6-981C71AEF8DE}"/>
+              </a:ext>
+            </a:extLst>
+          </p:cNvPr>
+          <p:cNvSpPr/>
+          <p:nvPr/>
+        </p:nvSpPr>
+        <p:spPr>
+          <a:xfrm>
+            <a:off x="4273065" y="2898246"/>
+            <a:ext cx="508000" cy="508000"/>
+          </a:xfrm>
+          <a:prstGeom prst="ellipse">
+            <a:avLst/>
+          </a:prstGeom>
+          <a:solidFill>
+            <a:srgbClr val="FF0000"/>
+          </a:solidFill>
+        </p:spPr>
+        <p:style>
+          <a:lnRef idx="2">
+            <a:schemeClr val="accent1">
+              <a:shade val="50000"/>
+            </a:schemeClr>
+          </a:lnRef>
+          <a:fillRef idx="1">
+            <a:schemeClr val="accent1"/>
+          </a:fillRef>
+          <a:effectRef idx="0">
+            <a:schemeClr val="accent1"/>
+          </a:effectRef>
+          <a:fontRef idx="minor">
+            <a:schemeClr val="lt1"/>
+          </a:fontRef>
+        </p:style>
+        <p:txBody>
+          <a:bodyPr rtlCol="0" anchor="ctr"/>
+          <a:lstStyle/>
+          <a:p>
+            <a:pPr algn="ctr"/>
+            <a:r>
+              <a:rPr lang="en-US" altLang="ko-KR" sz="2400">
+                <a:solidFill>
+                  <a:schemeClr val="bg1"/>
+                </a:solidFill>
+              </a:rPr>
+              <a:t>6</a:t>
+            </a:r>
+            <a:endParaRPr lang="ko-KR" altLang="en-US" sz="2400">
+              <a:solidFill>
+                <a:schemeClr val="bg1"/>
+              </a:solidFill>
+            </a:endParaRPr>
+          </a:p>
+        </p:txBody>
+      </p:sp>
+      <p:cxnSp>
+        <p:nvCxnSpPr>
+          <p:cNvPr id="54" name="직선 연결선 53">
+            <a:extLst>
+              <a:ext uri="{FF2B5EF4-FFF2-40B4-BE49-F238E27FC236}">
+                <a16:creationId xmlns:a16="http://schemas.microsoft.com/office/drawing/2014/main" id="{EB7C9FFB-5ABA-4839-B9EF-CE8E0D70D116}"/>
+              </a:ext>
+            </a:extLst>
+          </p:cNvPr>
+          <p:cNvCxnSpPr>
+            <a:cxnSpLocks/>
+            <a:stCxn id="36" idx="0"/>
+            <a:endCxn id="53" idx="3"/>
+          </p:cNvCxnSpPr>
+          <p:nvPr/>
+        </p:nvCxnSpPr>
+        <p:spPr>
+          <a:xfrm flipV="1">
+            <a:off x="3841559" y="3331851"/>
+            <a:ext cx="505901" cy="445260"/>
+          </a:xfrm>
+          <a:prstGeom prst="line">
+            <a:avLst/>
+          </a:prstGeom>
+          <a:ln>
+            <a:solidFill>
+              <a:schemeClr val="tx1"/>
+            </a:solidFill>
+          </a:ln>
+        </p:spPr>
+        <p:style>
+          <a:lnRef idx="1">
+            <a:schemeClr val="accent1"/>
+          </a:lnRef>
+          <a:fillRef idx="0">
+            <a:schemeClr val="accent1"/>
+          </a:fillRef>
+          <a:effectRef idx="0">
+            <a:schemeClr val="accent1"/>
+          </a:effectRef>
+          <a:fontRef idx="minor">
+            <a:schemeClr val="tx1"/>
+          </a:fontRef>
+        </p:style>
+      </p:cxnSp>
+      <p:sp>
+        <p:nvSpPr>
+          <p:cNvPr id="58" name="타원 57">
+            <a:extLst>
+              <a:ext uri="{FF2B5EF4-FFF2-40B4-BE49-F238E27FC236}">
+                <a16:creationId xmlns:a16="http://schemas.microsoft.com/office/drawing/2014/main" id="{0A5D9C2F-4CCA-4D08-BD87-AFA706DBDA38}"/>
+              </a:ext>
+            </a:extLst>
+          </p:cNvPr>
+          <p:cNvSpPr/>
+          <p:nvPr/>
+        </p:nvSpPr>
+        <p:spPr>
+          <a:xfrm>
+            <a:off x="5080000" y="3741718"/>
+            <a:ext cx="508000" cy="508000"/>
+          </a:xfrm>
+          <a:prstGeom prst="ellipse">
+            <a:avLst/>
+          </a:prstGeom>
+          <a:solidFill>
+            <a:schemeClr val="tx1"/>
+          </a:solidFill>
+        </p:spPr>
+        <p:style>
+          <a:lnRef idx="2">
+            <a:schemeClr val="accent1">
+              <a:shade val="50000"/>
+            </a:schemeClr>
+          </a:lnRef>
+          <a:fillRef idx="1">
+            <a:schemeClr val="accent1"/>
+          </a:fillRef>
+          <a:effectRef idx="0">
+            <a:schemeClr val="accent1"/>
+          </a:effectRef>
+          <a:fontRef idx="minor">
+            <a:schemeClr val="lt1"/>
+          </a:fontRef>
+        </p:style>
+        <p:txBody>
+          <a:bodyPr rtlCol="0" anchor="ctr"/>
+          <a:lstStyle/>
+          <a:p>
+            <a:pPr algn="ctr"/>
+            <a:r>
+              <a:rPr lang="en-US" altLang="ko-KR" sz="2400">
+                <a:solidFill>
+                  <a:schemeClr val="bg1"/>
+                </a:solidFill>
+              </a:rPr>
+              <a:t>7</a:t>
+            </a:r>
+            <a:endParaRPr lang="ko-KR" altLang="en-US" sz="2400">
+              <a:solidFill>
+                <a:schemeClr val="bg1"/>
+              </a:solidFill>
+            </a:endParaRPr>
+          </a:p>
+        </p:txBody>
+      </p:sp>
+      <p:cxnSp>
+        <p:nvCxnSpPr>
+          <p:cNvPr id="59" name="직선 연결선 58">
+            <a:extLst>
+              <a:ext uri="{FF2B5EF4-FFF2-40B4-BE49-F238E27FC236}">
+                <a16:creationId xmlns:a16="http://schemas.microsoft.com/office/drawing/2014/main" id="{1FF0FC3C-B7D1-44B9-833D-B9335B54D4A3}"/>
+              </a:ext>
+            </a:extLst>
+          </p:cNvPr>
+          <p:cNvCxnSpPr>
+            <a:cxnSpLocks/>
+            <a:stCxn id="53" idx="5"/>
+            <a:endCxn id="58" idx="0"/>
+          </p:cNvCxnSpPr>
+          <p:nvPr/>
+        </p:nvCxnSpPr>
+        <p:spPr>
+          <a:xfrm>
+            <a:off x="4706670" y="3331851"/>
+            <a:ext cx="627330" cy="409867"/>
+          </a:xfrm>
+          <a:prstGeom prst="line">
+            <a:avLst/>
+          </a:prstGeom>
+          <a:ln>
+            <a:solidFill>
+              <a:schemeClr val="tx1"/>
+            </a:solidFill>
+          </a:ln>
+        </p:spPr>
+        <p:style>
+          <a:lnRef idx="1">
+            <a:schemeClr val="accent1"/>
+          </a:lnRef>
+          <a:fillRef idx="0">
+            <a:schemeClr val="accent1"/>
+          </a:fillRef>
+          <a:effectRef idx="0">
+            <a:schemeClr val="accent1"/>
+          </a:effectRef>
+          <a:fontRef idx="minor">
+            <a:schemeClr val="tx1"/>
+          </a:fontRef>
+        </p:style>
+      </p:cxnSp>
+      <p:sp>
+        <p:nvSpPr>
+          <p:cNvPr id="69" name="타원 68">
+            <a:extLst>
+              <a:ext uri="{FF2B5EF4-FFF2-40B4-BE49-F238E27FC236}">
+                <a16:creationId xmlns:a16="http://schemas.microsoft.com/office/drawing/2014/main" id="{5B70A3BE-E2FE-4148-B61D-EA3EA320455D}"/>
+              </a:ext>
+            </a:extLst>
+          </p:cNvPr>
+          <p:cNvSpPr/>
+          <p:nvPr/>
+        </p:nvSpPr>
+        <p:spPr>
+          <a:xfrm>
+            <a:off x="5972677" y="4366583"/>
+            <a:ext cx="508000" cy="508000"/>
+          </a:xfrm>
+          <a:prstGeom prst="ellipse">
+            <a:avLst/>
+          </a:prstGeom>
+          <a:solidFill>
+            <a:srgbClr val="FF0000"/>
+          </a:solidFill>
+        </p:spPr>
+        <p:style>
+          <a:lnRef idx="2">
+            <a:schemeClr val="accent1">
+              <a:shade val="50000"/>
+            </a:schemeClr>
+          </a:lnRef>
+          <a:fillRef idx="1">
+            <a:schemeClr val="accent1"/>
+          </a:fillRef>
+          <a:effectRef idx="0">
+            <a:schemeClr val="accent1"/>
+          </a:effectRef>
+          <a:fontRef idx="minor">
+            <a:schemeClr val="lt1"/>
+          </a:fontRef>
+        </p:style>
+        <p:txBody>
+          <a:bodyPr rtlCol="0" anchor="ctr"/>
+          <a:lstStyle/>
+          <a:p>
+            <a:pPr algn="ctr"/>
+            <a:r>
+              <a:rPr lang="en-US" altLang="ko-KR" sz="2400">
+                <a:solidFill>
+                  <a:schemeClr val="bg1"/>
+                </a:solidFill>
+              </a:rPr>
+              <a:t>8</a:t>
+            </a:r>
+            <a:endParaRPr lang="ko-KR" altLang="en-US" sz="2400">
+              <a:solidFill>
+                <a:schemeClr val="bg1"/>
+              </a:solidFill>
+            </a:endParaRPr>
+          </a:p>
+        </p:txBody>
+      </p:sp>
+      <p:cxnSp>
+        <p:nvCxnSpPr>
+          <p:cNvPr id="70" name="직선 연결선 69">
+            <a:extLst>
+              <a:ext uri="{FF2B5EF4-FFF2-40B4-BE49-F238E27FC236}">
+                <a16:creationId xmlns:a16="http://schemas.microsoft.com/office/drawing/2014/main" id="{1A07997C-C30D-4EB9-A9C5-E8EBB98CC48A}"/>
+              </a:ext>
+            </a:extLst>
+          </p:cNvPr>
+          <p:cNvCxnSpPr>
+            <a:cxnSpLocks/>
+            <a:stCxn id="58" idx="5"/>
+            <a:endCxn id="69" idx="0"/>
+          </p:cNvCxnSpPr>
+          <p:nvPr/>
+        </p:nvCxnSpPr>
+        <p:spPr>
+          <a:xfrm>
+            <a:off x="5513605" y="4175323"/>
+            <a:ext cx="713072" cy="191260"/>
+          </a:xfrm>
+          <a:prstGeom prst="line">
+            <a:avLst/>
+          </a:prstGeom>
+          <a:ln>
+            <a:solidFill>
+              <a:schemeClr val="tx1"/>
+            </a:solidFill>
+          </a:ln>
+        </p:spPr>
+        <p:style>
+          <a:lnRef idx="1">
+            <a:schemeClr val="accent1"/>
+          </a:lnRef>
+          <a:fillRef idx="0">
+            <a:schemeClr val="accent1"/>
+          </a:fillRef>
+          <a:effectRef idx="0">
+            <a:schemeClr val="accent1"/>
+          </a:effectRef>
+          <a:fontRef idx="minor">
+            <a:schemeClr val="tx1"/>
+          </a:fontRef>
+        </p:style>
+      </p:cxnSp>
+      <p:pic>
+        <p:nvPicPr>
+          <p:cNvPr id="88" name="그림 87">
+            <a:extLst>
+              <a:ext uri="{FF2B5EF4-FFF2-40B4-BE49-F238E27FC236}">
+                <a16:creationId xmlns:a16="http://schemas.microsoft.com/office/drawing/2014/main" id="{75852622-62E9-4E0F-86BB-A68A5171331F}"/>
+              </a:ext>
+            </a:extLst>
+          </p:cNvPr>
+          <p:cNvPicPr>
+            <a:picLocks noChangeAspect="1"/>
+          </p:cNvPicPr>
+          <p:nvPr/>
+        </p:nvPicPr>
+        <p:blipFill>
+          <a:blip r:embed="rId2"/>
+          <a:stretch>
+            <a:fillRect/>
+          </a:stretch>
+        </p:blipFill>
+        <p:spPr>
+          <a:xfrm>
+            <a:off x="1120151" y="4503718"/>
+            <a:ext cx="4467849" cy="3019846"/>
+          </a:xfrm>
+          <a:prstGeom prst="rect">
+            <a:avLst/>
+          </a:prstGeom>
+        </p:spPr>
+      </p:pic>
+    </p:spTree>
+    <p:extLst>
+      <p:ext uri="{BB962C8B-B14F-4D97-AF65-F5344CB8AC3E}">
+        <p14:creationId xmlns:p14="http://schemas.microsoft.com/office/powerpoint/2010/main" val="776114482"/>
       </p:ext>
     </p:extLst>
   </p:cSld>
@@ -3754,7 +5711,41 @@
       </a:bgFillStyleLst>
     </a:fmtScheme>
   </a:themeElements>
-  <a:objectDefaults/>
+  <a:objectDefaults>
+    <a:spDef>
+      <a:spPr>
+        <a:solidFill>
+          <a:srgbClr val="FFFF00"/>
+        </a:solidFill>
+      </a:spPr>
+      <a:bodyPr rtlCol="0" anchor="ctr"/>
+      <a:lstStyle>
+        <a:defPPr algn="ctr">
+          <a:defRPr smtClean="0">
+            <a:solidFill>
+              <a:schemeClr val="tx1"/>
+            </a:solidFill>
+          </a:defRPr>
+        </a:defPPr>
+      </a:lstStyle>
+      <a:style>
+        <a:lnRef idx="2">
+          <a:schemeClr val="accent1">
+            <a:shade val="50000"/>
+          </a:schemeClr>
+        </a:lnRef>
+        <a:fillRef idx="1">
+          <a:schemeClr val="accent1"/>
+        </a:fillRef>
+        <a:effectRef idx="0">
+          <a:schemeClr val="accent1"/>
+        </a:effectRef>
+        <a:fontRef idx="minor">
+          <a:schemeClr val="lt1"/>
+        </a:fontRef>
+      </a:style>
+    </a:spDef>
+  </a:objectDefaults>
   <a:extraClrSchemeLst/>
   <a:extLst>
     <a:ext uri="{05A4C25C-085E-4340-85A3-A5531E510DB2}">
